--- a/dist/weeks-포트폴리오제작/포트폴리오제작_04주차_스토리라인기획1.pptx
+++ b/dist/weeks-포트폴리오제작/포트폴리오제작_04주차_스토리라인기획1.pptx
@@ -2422,7 +2422,7 @@
                 <a:ea typeface="Pretendard" pitchFamily="34" charset="-122"/>
                 <a:cs typeface="Pretendard" pitchFamily="34" charset="-120"/>
               </a:rPr>
-              <a:t>90분 — 강의 20분 · 실습 50분 · 동료 피드백 20분</a:t>
+              <a:t>120분 — 강의 20분 · 실습 70분 · 동료 피드백 20분</a:t>
             </a:r>
             <a:endParaRPr lang="en-US" sz="1200" dirty="0"/>
           </a:p>
@@ -2855,7 +2855,7 @@
                 <a:ea typeface="Pretendard" pitchFamily="34" charset="-122"/>
                 <a:cs typeface="Pretendard" pitchFamily="34" charset="-120"/>
               </a:rPr>
-              <a:t>50분 · 개인 — 스토리보드 양식에 채웁니다.</a:t>
+              <a:t>70분 · 개인 — 스토리보드 양식에 채웁니다. 중간에 휴식이 한 번 들어갑니다.</a:t>
             </a:r>
             <a:endParaRPr lang="en-US" sz="1150" dirty="0"/>
           </a:p>
@@ -2919,7 +2919,7 @@
                 <a:ea typeface="Pretendard Light" pitchFamily="34" charset="-122"/>
                 <a:cs typeface="Pretendard Light" pitchFamily="34" charset="-120"/>
               </a:rPr>
-              <a:t>10분</a:t>
+              <a:t>12분</a:t>
             </a:r>
             <a:endParaRPr lang="en-US" sz="2200" dirty="0"/>
           </a:p>
@@ -3064,7 +3064,7 @@
                 <a:ea typeface="Pretendard Light" pitchFamily="34" charset="-122"/>
                 <a:cs typeface="Pretendard Light" pitchFamily="34" charset="-120"/>
               </a:rPr>
-              <a:t>10분</a:t>
+              <a:t>13분</a:t>
             </a:r>
             <a:endParaRPr lang="en-US" sz="2200" dirty="0"/>
           </a:p>
@@ -3209,7 +3209,7 @@
                 <a:ea typeface="Pretendard Light" pitchFamily="34" charset="-122"/>
                 <a:cs typeface="Pretendard Light" pitchFamily="34" charset="-120"/>
               </a:rPr>
-              <a:t>20분</a:t>
+              <a:t>30분</a:t>
             </a:r>
             <a:endParaRPr lang="en-US" sz="2200" dirty="0"/>
           </a:p>
@@ -3354,7 +3354,7 @@
                 <a:ea typeface="Pretendard Light" pitchFamily="34" charset="-122"/>
                 <a:cs typeface="Pretendard Light" pitchFamily="34" charset="-120"/>
               </a:rPr>
-              <a:t>10분</a:t>
+              <a:t>15분</a:t>
             </a:r>
             <a:endParaRPr lang="en-US" sz="2200" dirty="0"/>
           </a:p>
@@ -5962,7 +5962,7 @@
                 <a:ea typeface="Pretendard Black" pitchFamily="34" charset="-122"/>
                 <a:cs typeface="Pretendard Black" pitchFamily="34" charset="-120"/>
               </a:rPr>
-              <a:t>오늘의 90분</a:t>
+              <a:t>오늘의 120분</a:t>
             </a:r>
             <a:endParaRPr lang="en-US" sz="3000" dirty="0"/>
           </a:p>
@@ -6001,7 +6001,7 @@
                 <a:ea typeface="Pretendard" pitchFamily="34" charset="-122"/>
                 <a:cs typeface="Pretendard" pitchFamily="34" charset="-120"/>
               </a:rPr>
-              <a:t>강의 20분 · 실습 50분 · 동료 피드백 20분</a:t>
+              <a:t>강의 20분 · 실습 70분 · 동료 피드백 20분</a:t>
             </a:r>
             <a:endParaRPr lang="en-US" sz="1150" dirty="0"/>
           </a:p>
@@ -6041,7 +6041,7 @@
         <p:spPr>
           <a:xfrm>
             <a:off x="640080" y="1719072"/>
-            <a:ext cx="1600200" cy="932688"/>
+            <a:ext cx="1600200" cy="830275"/>
           </a:xfrm>
           <a:prstGeom prst="rect">
             <a:avLst/>
@@ -6080,7 +6080,7 @@
         <p:spPr>
           <a:xfrm>
             <a:off x="2377440" y="1719072"/>
-            <a:ext cx="6888175" cy="932688"/>
+            <a:ext cx="6888175" cy="830275"/>
           </a:xfrm>
           <a:prstGeom prst="rect">
             <a:avLst/>
@@ -6119,7 +6119,7 @@
         <p:spPr>
           <a:xfrm>
             <a:off x="9265615" y="1719072"/>
-            <a:ext cx="2286000" cy="932688"/>
+            <a:ext cx="2286000" cy="830275"/>
           </a:xfrm>
           <a:prstGeom prst="rect">
             <a:avLst/>
@@ -6157,7 +6157,7 @@
         </p:nvSpPr>
         <p:spPr>
           <a:xfrm>
-            <a:off x="640080" y="2633472"/>
+            <a:off x="640080" y="2531059"/>
             <a:ext cx="10911535" cy="7315"/>
           </a:xfrm>
           <a:prstGeom prst="rect">
@@ -6182,8 +6182,8 @@
         </p:nvSpPr>
         <p:spPr>
           <a:xfrm>
-            <a:off x="640080" y="2651760"/>
-            <a:ext cx="1600200" cy="932688"/>
+            <a:off x="640080" y="2549347"/>
+            <a:ext cx="1600200" cy="830275"/>
           </a:xfrm>
           <a:prstGeom prst="rect">
             <a:avLst/>
@@ -6207,7 +6207,7 @@
                 <a:ea typeface="Pretendard" pitchFamily="34" charset="-122"/>
                 <a:cs typeface="Pretendard" pitchFamily="34" charset="-120"/>
               </a:rPr>
-              <a:t>00:20–01:10</a:t>
+              <a:t>00:20–01:05</a:t>
             </a:r>
             <a:endParaRPr lang="en-US" sz="1050" dirty="0"/>
           </a:p>
@@ -6221,8 +6221,8 @@
         </p:nvSpPr>
         <p:spPr>
           <a:xfrm>
-            <a:off x="2377440" y="2651760"/>
-            <a:ext cx="6888175" cy="932688"/>
+            <a:off x="2377440" y="2549347"/>
+            <a:ext cx="6888175" cy="830275"/>
           </a:xfrm>
           <a:prstGeom prst="rect">
             <a:avLst/>
@@ -6246,7 +6246,7 @@
                 <a:ea typeface="Pretendard" pitchFamily="34" charset="-122"/>
                 <a:cs typeface="Pretendard" pitchFamily="34" charset="-120"/>
               </a:rPr>
-              <a:t>스토리라인 작성 실습</a:t>
+              <a:t>실습 — 스토리라인 작성 (1)</a:t>
             </a:r>
             <a:endParaRPr lang="en-US" sz="1300" dirty="0"/>
           </a:p>
@@ -6260,8 +6260,8 @@
         </p:nvSpPr>
         <p:spPr>
           <a:xfrm>
-            <a:off x="9265615" y="2651760"/>
-            <a:ext cx="2286000" cy="932688"/>
+            <a:off x="9265615" y="2549347"/>
+            <a:ext cx="2286000" cy="830275"/>
           </a:xfrm>
           <a:prstGeom prst="rect">
             <a:avLst/>
@@ -6299,7 +6299,7 @@
         </p:nvSpPr>
         <p:spPr>
           <a:xfrm>
-            <a:off x="640080" y="3566160"/>
+            <a:off x="640080" y="3361334"/>
             <a:ext cx="10911535" cy="7315"/>
           </a:xfrm>
           <a:prstGeom prst="rect">
@@ -6324,8 +6324,111 @@
         </p:nvSpPr>
         <p:spPr>
           <a:xfrm>
-            <a:off x="640080" y="3584448"/>
-            <a:ext cx="1600200" cy="932688"/>
+            <a:off x="640080" y="3379622"/>
+            <a:ext cx="1600200" cy="830275"/>
+          </a:xfrm>
+          <a:prstGeom prst="rect">
+            <a:avLst/>
+          </a:prstGeom>
+          <a:noFill/>
+          <a:ln/>
+        </p:spPr>
+        <p:txBody>
+          <a:bodyPr wrap="square" lIns="0" tIns="0" rIns="0" bIns="0" rtlCol="0" anchor="ctr"/>
+          <a:lstStyle/>
+          <a:p>
+            <a:pPr indent="0" marL="0">
+              <a:buNone/>
+            </a:pPr>
+            <a:r>
+              <a:rPr lang="en-US" sz="1050" spc="60" kern="0" dirty="0">
+                <a:solidFill>
+                  <a:srgbClr val="9B9B9B"/>
+                </a:solidFill>
+                <a:latin typeface="Pretendard" pitchFamily="34" charset="0"/>
+                <a:ea typeface="Pretendard" pitchFamily="34" charset="-122"/>
+                <a:cs typeface="Pretendard" pitchFamily="34" charset="-120"/>
+              </a:rPr>
+              <a:t>01:05–01:15</a:t>
+            </a:r>
+            <a:endParaRPr lang="en-US" sz="1050" dirty="0"/>
+          </a:p>
+        </p:txBody>
+      </p:sp>
+      <p:sp>
+        <p:nvSpPr>
+          <p:cNvPr id="19" name="Text 17"/>
+          <p:cNvSpPr/>
+          <p:nvPr/>
+        </p:nvSpPr>
+        <p:spPr>
+          <a:xfrm>
+            <a:off x="2377440" y="3379622"/>
+            <a:ext cx="6888175" cy="830275"/>
+          </a:xfrm>
+          <a:prstGeom prst="rect">
+            <a:avLst/>
+          </a:prstGeom>
+          <a:noFill/>
+          <a:ln/>
+        </p:spPr>
+        <p:txBody>
+          <a:bodyPr wrap="square" lIns="0" tIns="0" rIns="0" bIns="0" rtlCol="0" anchor="ctr"/>
+          <a:lstStyle/>
+          <a:p>
+            <a:pPr indent="0" marL="0">
+              <a:buNone/>
+            </a:pPr>
+            <a:r>
+              <a:rPr lang="en-US" sz="1100" dirty="0">
+                <a:solidFill>
+                  <a:srgbClr val="9B9B9B"/>
+                </a:solidFill>
+                <a:latin typeface="Pretendard" pitchFamily="34" charset="0"/>
+                <a:ea typeface="Pretendard" pitchFamily="34" charset="-122"/>
+                <a:cs typeface="Pretendard" pitchFamily="34" charset="-120"/>
+              </a:rPr>
+              <a:t>휴식</a:t>
+            </a:r>
+            <a:endParaRPr lang="en-US" sz="1100" dirty="0"/>
+          </a:p>
+        </p:txBody>
+      </p:sp>
+      <p:sp>
+        <p:nvSpPr>
+          <p:cNvPr id="20" name="Shape 18"/>
+          <p:cNvSpPr/>
+          <p:nvPr/>
+        </p:nvSpPr>
+        <p:spPr>
+          <a:xfrm>
+            <a:off x="640080" y="4191610"/>
+            <a:ext cx="10911535" cy="7315"/>
+          </a:xfrm>
+          <a:prstGeom prst="rect">
+            <a:avLst/>
+          </a:prstGeom>
+          <a:solidFill>
+            <a:srgbClr val="EFEFEF"/>
+          </a:solidFill>
+          <a:ln w="12700">
+            <a:solidFill>
+              <a:srgbClr val="EFEFEF"/>
+            </a:solidFill>
+            <a:prstDash val="solid"/>
+          </a:ln>
+        </p:spPr>
+      </p:sp>
+      <p:sp>
+        <p:nvSpPr>
+          <p:cNvPr id="21" name="Text 19"/>
+          <p:cNvSpPr/>
+          <p:nvPr/>
+        </p:nvSpPr>
+        <p:spPr>
+          <a:xfrm>
+            <a:off x="640080" y="4209898"/>
+            <a:ext cx="1600200" cy="830275"/>
           </a:xfrm>
           <a:prstGeom prst="rect">
             <a:avLst/>
@@ -6349,7 +6452,7 @@
                 <a:ea typeface="Pretendard" pitchFamily="34" charset="-122"/>
                 <a:cs typeface="Pretendard" pitchFamily="34" charset="-120"/>
               </a:rPr>
-              <a:t>01:10–01:30</a:t>
+              <a:t>01:15–01:40</a:t>
             </a:r>
             <a:endParaRPr lang="en-US" sz="1050" dirty="0"/>
           </a:p>
@@ -6357,14 +6460,14 @@
       </p:sp>
       <p:sp>
         <p:nvSpPr>
-          <p:cNvPr id="19" name="Text 17"/>
-          <p:cNvSpPr/>
-          <p:nvPr/>
-        </p:nvSpPr>
-        <p:spPr>
-          <a:xfrm>
-            <a:off x="2377440" y="3584448"/>
-            <a:ext cx="6888175" cy="932688"/>
+          <p:cNvPr id="22" name="Text 20"/>
+          <p:cNvSpPr/>
+          <p:nvPr/>
+        </p:nvSpPr>
+        <p:spPr>
+          <a:xfrm>
+            <a:off x="2377440" y="4209898"/>
+            <a:ext cx="6888175" cy="830275"/>
           </a:xfrm>
           <a:prstGeom prst="rect">
             <a:avLst/>
@@ -6388,6 +6491,148 @@
                 <a:ea typeface="Pretendard" pitchFamily="34" charset="-122"/>
                 <a:cs typeface="Pretendard" pitchFamily="34" charset="-120"/>
               </a:rPr>
+              <a:t>실습 — 스토리라인 작성 (2)</a:t>
+            </a:r>
+            <a:endParaRPr lang="en-US" sz="1300" dirty="0"/>
+          </a:p>
+        </p:txBody>
+      </p:sp>
+      <p:sp>
+        <p:nvSpPr>
+          <p:cNvPr id="23" name="Text 21"/>
+          <p:cNvSpPr/>
+          <p:nvPr/>
+        </p:nvSpPr>
+        <p:spPr>
+          <a:xfrm>
+            <a:off x="9265615" y="4209898"/>
+            <a:ext cx="2286000" cy="830275"/>
+          </a:xfrm>
+          <a:prstGeom prst="rect">
+            <a:avLst/>
+          </a:prstGeom>
+          <a:noFill/>
+          <a:ln/>
+        </p:spPr>
+        <p:txBody>
+          <a:bodyPr wrap="square" lIns="0" tIns="0" rIns="0" bIns="0" rtlCol="0" anchor="ctr"/>
+          <a:lstStyle/>
+          <a:p>
+            <a:pPr algn="r" indent="0" marL="0">
+              <a:buNone/>
+            </a:pPr>
+            <a:r>
+              <a:rPr lang="en-US" sz="1050" dirty="0">
+                <a:solidFill>
+                  <a:srgbClr val="6E6E6E"/>
+                </a:solidFill>
+                <a:latin typeface="Pretendard" pitchFamily="34" charset="0"/>
+                <a:ea typeface="Pretendard" pitchFamily="34" charset="-122"/>
+                <a:cs typeface="Pretendard" pitchFamily="34" charset="-120"/>
+              </a:rPr>
+              <a:t>개인 워크 + 순회</a:t>
+            </a:r>
+            <a:endParaRPr lang="en-US" sz="1050" dirty="0"/>
+          </a:p>
+        </p:txBody>
+      </p:sp>
+      <p:sp>
+        <p:nvSpPr>
+          <p:cNvPr id="24" name="Shape 22"/>
+          <p:cNvSpPr/>
+          <p:nvPr/>
+        </p:nvSpPr>
+        <p:spPr>
+          <a:xfrm>
+            <a:off x="640080" y="5021885"/>
+            <a:ext cx="10911535" cy="7315"/>
+          </a:xfrm>
+          <a:prstGeom prst="rect">
+            <a:avLst/>
+          </a:prstGeom>
+          <a:solidFill>
+            <a:srgbClr val="DCDCDC"/>
+          </a:solidFill>
+          <a:ln w="12700">
+            <a:solidFill>
+              <a:srgbClr val="DCDCDC"/>
+            </a:solidFill>
+            <a:prstDash val="solid"/>
+          </a:ln>
+        </p:spPr>
+      </p:sp>
+      <p:sp>
+        <p:nvSpPr>
+          <p:cNvPr id="25" name="Text 23"/>
+          <p:cNvSpPr/>
+          <p:nvPr/>
+        </p:nvSpPr>
+        <p:spPr>
+          <a:xfrm>
+            <a:off x="640080" y="5040173"/>
+            <a:ext cx="1600200" cy="830275"/>
+          </a:xfrm>
+          <a:prstGeom prst="rect">
+            <a:avLst/>
+          </a:prstGeom>
+          <a:noFill/>
+          <a:ln/>
+        </p:spPr>
+        <p:txBody>
+          <a:bodyPr wrap="square" lIns="0" tIns="0" rIns="0" bIns="0" rtlCol="0" anchor="ctr"/>
+          <a:lstStyle/>
+          <a:p>
+            <a:pPr indent="0" marL="0">
+              <a:buNone/>
+            </a:pPr>
+            <a:r>
+              <a:rPr lang="en-US" sz="1050" b="1" spc="60" kern="0" dirty="0">
+                <a:solidFill>
+                  <a:srgbClr val="111111"/>
+                </a:solidFill>
+                <a:latin typeface="Pretendard" pitchFamily="34" charset="0"/>
+                <a:ea typeface="Pretendard" pitchFamily="34" charset="-122"/>
+                <a:cs typeface="Pretendard" pitchFamily="34" charset="-120"/>
+              </a:rPr>
+              <a:t>01:40–02:00</a:t>
+            </a:r>
+            <a:endParaRPr lang="en-US" sz="1050" dirty="0"/>
+          </a:p>
+        </p:txBody>
+      </p:sp>
+      <p:sp>
+        <p:nvSpPr>
+          <p:cNvPr id="26" name="Text 24"/>
+          <p:cNvSpPr/>
+          <p:nvPr/>
+        </p:nvSpPr>
+        <p:spPr>
+          <a:xfrm>
+            <a:off x="2377440" y="5040173"/>
+            <a:ext cx="6888175" cy="830275"/>
+          </a:xfrm>
+          <a:prstGeom prst="rect">
+            <a:avLst/>
+          </a:prstGeom>
+          <a:noFill/>
+          <a:ln/>
+        </p:spPr>
+        <p:txBody>
+          <a:bodyPr wrap="square" lIns="0" tIns="0" rIns="0" bIns="0" rtlCol="0" anchor="ctr"/>
+          <a:lstStyle/>
+          <a:p>
+            <a:pPr indent="0" marL="0">
+              <a:buNone/>
+            </a:pPr>
+            <a:r>
+              <a:rPr lang="en-US" sz="1300" b="1" dirty="0">
+                <a:solidFill>
+                  <a:srgbClr val="111111"/>
+                </a:solidFill>
+                <a:latin typeface="Pretendard" pitchFamily="34" charset="0"/>
+                <a:ea typeface="Pretendard" pitchFamily="34" charset="-122"/>
+                <a:cs typeface="Pretendard" pitchFamily="34" charset="-120"/>
+              </a:rPr>
               <a:t>동료 피드백</a:t>
             </a:r>
             <a:endParaRPr lang="en-US" sz="1300" dirty="0"/>
@@ -6396,14 +6641,14 @@
       </p:sp>
       <p:sp>
         <p:nvSpPr>
-          <p:cNvPr id="20" name="Text 18"/>
-          <p:cNvSpPr/>
-          <p:nvPr/>
-        </p:nvSpPr>
-        <p:spPr>
-          <a:xfrm>
-            <a:off x="9265615" y="3584448"/>
-            <a:ext cx="2286000" cy="932688"/>
+          <p:cNvPr id="27" name="Text 25"/>
+          <p:cNvSpPr/>
+          <p:nvPr/>
+        </p:nvSpPr>
+        <p:spPr>
+          <a:xfrm>
+            <a:off x="9265615" y="5040173"/>
+            <a:ext cx="2286000" cy="830275"/>
           </a:xfrm>
           <a:prstGeom prst="rect">
             <a:avLst/>
@@ -6435,14 +6680,14 @@
       </p:sp>
       <p:sp>
         <p:nvSpPr>
-          <p:cNvPr id="21" name="Shape 19"/>
-          <p:cNvSpPr/>
-          <p:nvPr/>
-        </p:nvSpPr>
-        <p:spPr>
-          <a:xfrm>
-            <a:off x="640080" y="4828032"/>
-            <a:ext cx="10911535" cy="969264"/>
+          <p:cNvPr id="28" name="Shape 26"/>
+          <p:cNvSpPr/>
+          <p:nvPr/>
+        </p:nvSpPr>
+        <p:spPr>
+          <a:xfrm>
+            <a:off x="640080" y="5852160"/>
+            <a:ext cx="10911535" cy="7315"/>
           </a:xfrm>
           <a:prstGeom prst="rect">
             <a:avLst/>
@@ -6460,88 +6705,7 @@
       </p:sp>
       <p:sp>
         <p:nvSpPr>
-          <p:cNvPr id="22" name="Text 20"/>
-          <p:cNvSpPr/>
-          <p:nvPr/>
-        </p:nvSpPr>
-        <p:spPr>
-          <a:xfrm>
-            <a:off x="1097280" y="5010912"/>
-            <a:ext cx="2743200" cy="256032"/>
-          </a:xfrm>
-          <a:prstGeom prst="rect">
-            <a:avLst/>
-          </a:prstGeom>
-          <a:noFill/>
-          <a:ln/>
-        </p:spPr>
-        <p:txBody>
-          <a:bodyPr wrap="square" lIns="0" tIns="0" rIns="0" bIns="0" rtlCol="0" anchor="ctr"/>
-          <a:lstStyle/>
-          <a:p>
-            <a:pPr indent="0" marL="0">
-              <a:buNone/>
-            </a:pPr>
-            <a:r>
-              <a:rPr lang="en-US" sz="950" spc="240" kern="0" dirty="0">
-                <a:solidFill>
-                  <a:srgbClr val="9A9A9A"/>
-                </a:solidFill>
-                <a:latin typeface="Pretendard" pitchFamily="34" charset="0"/>
-                <a:ea typeface="Pretendard" pitchFamily="34" charset="-122"/>
-                <a:cs typeface="Pretendard" pitchFamily="34" charset="-120"/>
-              </a:rPr>
-              <a:t>오늘 끝나면</a:t>
-            </a:r>
-            <a:endParaRPr lang="en-US" sz="950" dirty="0"/>
-          </a:p>
-        </p:txBody>
-      </p:sp>
-      <p:sp>
-        <p:nvSpPr>
-          <p:cNvPr id="23" name="Text 21"/>
-          <p:cNvSpPr/>
-          <p:nvPr/>
-        </p:nvSpPr>
-        <p:spPr>
-          <a:xfrm>
-            <a:off x="1097280" y="5285232"/>
-            <a:ext cx="9997135" cy="365760"/>
-          </a:xfrm>
-          <a:prstGeom prst="rect">
-            <a:avLst/>
-          </a:prstGeom>
-          <a:noFill/>
-          <a:ln/>
-        </p:spPr>
-        <p:txBody>
-          <a:bodyPr wrap="square" lIns="0" tIns="0" rIns="0" bIns="0" rtlCol="0" anchor="ctr"/>
-          <a:lstStyle/>
-          <a:p>
-            <a:pPr indent="0" marL="0">
-              <a:lnSpc>
-                <a:spcPct val="126000"/>
-              </a:lnSpc>
-              <a:buNone/>
-            </a:pPr>
-            <a:r>
-              <a:rPr lang="en-US" sz="1600" dirty="0">
-                <a:solidFill>
-                  <a:srgbClr val="FFFFFF"/>
-                </a:solidFill>
-                <a:latin typeface="Pretendard Black" pitchFamily="34" charset="0"/>
-                <a:ea typeface="Pretendard Black" pitchFamily="34" charset="-122"/>
-                <a:cs typeface="Pretendard Black" pitchFamily="34" charset="-120"/>
-              </a:rPr>
-              <a:t>넣을 프로젝트 3~5개가 정해지고, 어떤 순서로 배치할지 초안이 나옵니다.</a:t>
-            </a:r>
-            <a:endParaRPr lang="en-US" sz="1600" dirty="0"/>
-          </a:p>
-        </p:txBody>
-      </p:sp>
-      <p:sp>
-        <p:nvSpPr>
-          <p:cNvPr id="24" name="Shape 22"/>
+          <p:cNvPr id="29" name="Shape 27"/>
           <p:cNvSpPr/>
           <p:nvPr/>
         </p:nvSpPr>
@@ -6566,7 +6730,7 @@
       </p:sp>
       <p:sp>
         <p:nvSpPr>
-          <p:cNvPr id="25" name="Text 23"/>
+          <p:cNvPr id="30" name="Text 28"/>
           <p:cNvSpPr/>
           <p:nvPr/>
         </p:nvSpPr>
@@ -6605,7 +6769,7 @@
       </p:sp>
       <p:sp>
         <p:nvSpPr>
-          <p:cNvPr id="26" name="Text 24"/>
+          <p:cNvPr id="31" name="Text 29"/>
           <p:cNvSpPr/>
           <p:nvPr/>
         </p:nvSpPr>

--- a/dist/weeks-포트폴리오제작/포트폴리오제작_04주차_스토리라인기획1.pptx
+++ b/dist/weeks-포트폴리오제작/포트폴리오제작_04주차_스토리라인기획1.pptx
@@ -513,7 +513,8 @@
           <a:p>
             <a:r>
               <a:rPr lang="en-US" dirty="0"/>
-              <a:t>오늘 정한 목록이 학기 후반 작업량을 결정한다. 욕심내서 7~8개를 남기는 학생은 10~11주차에 반드시 무너지므로 오늘 줄이게 할 것.</a:t>
+              <a:t>[운영 메모]
+오늘 정한 목록이 학기 후반 작업량을 결정한다. 욕심내서 7~8개를 남기는 학생은 10~11주차에 반드시 무너지므로 오늘 줄이게 할 것.</a:t>
             </a:r>
             <a:endParaRPr lang="en-US" dirty="0"/>
           </a:p>
@@ -601,7 +602,8 @@
           <a:p>
             <a:r>
               <a:rPr lang="en-US" dirty="0"/>
-              <a:t>점수 매기기를 건너뛰고 바로 고르려는 학생이 있다. 10분은 반드시 지키게 할 것.</a:t>
+              <a:t>[운영 메모]
+점수 매기기를 건너뛰고 바로 고르려는 학생이 있다. 10분은 반드시 지키게 할 것.</a:t>
             </a:r>
             <a:endParaRPr lang="en-US" dirty="0"/>
           </a:p>
@@ -689,7 +691,8 @@
           <a:p>
             <a:r>
               <a:rPr lang="en-US" dirty="0"/>
-              <a:t>'평가하지 말고 묻기만'을 강조. 4주차 동료 피드백에서 서로 지적하기 시작하면 분위기가 나빠진다.</a:t>
+              <a:t>[운영 메모]
+'평가하지 말고 묻기만'을 강조. 4주차 동료 피드백에서 서로 지적하기 시작하면 분위기가 나빠진다.</a:t>
             </a:r>
             <a:endParaRPr lang="en-US" dirty="0"/>
           </a:p>
@@ -777,7 +780,8 @@
           <a:p>
             <a:r>
               <a:rPr lang="en-US" dirty="0"/>
-              <a:t>'빼기로 한 것'을 같이 받아야 튜터링에서 되살릴지 판단할 수 있다. 반드시 함께 제출하게 할 것.</a:t>
+              <a:t>[운영 메모]
+'빼기로 한 것'을 같이 받아야 튜터링에서 되살릴지 판단할 수 있다. 반드시 함께 제출하게 할 것.</a:t>
             </a:r>
             <a:endParaRPr lang="en-US" dirty="0"/>
           </a:p>
@@ -865,7 +869,8 @@
           <a:p>
             <a:r>
               <a:rPr lang="en-US" dirty="0"/>
-              <a:t>실습 50분 동안 순회하며 '이건 왜 넣었어요?'를 한 번씩 물어봐 주면 학생 스스로 기준을 점검하게 된다.</a:t>
+              <a:t>[운영 메모]
+실습 50분 동안 순회하며 '이건 왜 넣었어요?'를 한 번씩 물어봐 주면 학생 스스로 기준을 점검하게 된다.</a:t>
             </a:r>
             <a:endParaRPr lang="en-US" dirty="0"/>
           </a:p>
@@ -953,7 +958,8 @@
           <a:p>
             <a:r>
               <a:rPr lang="en-US" dirty="0"/>
-              <a:t>2번이 오늘의 핵심. 학생들은 가진 것을 다 넣으려 한다.</a:t>
+              <a:t>[운영 메모]
+2번이 오늘의 핵심. 학생들은 가진 것을 다 넣으려 한다.</a:t>
             </a:r>
             <a:endParaRPr lang="en-US" dirty="0"/>
           </a:p>
@@ -1041,7 +1047,8 @@
           <a:p>
             <a:r>
               <a:rPr lang="en-US" dirty="0"/>
-              <a:t>강의는 20분 안에 끝낼 것. 나머지는 실습.</a:t>
+              <a:t>[운영 메모]
+강의는 20분 안에 끝낼 것. 나머지는 실습.</a:t>
             </a:r>
             <a:endParaRPr lang="en-US" dirty="0"/>
           </a:p>
@@ -1129,7 +1136,8 @@
           <a:p>
             <a:r>
               <a:rPr lang="en-US" dirty="0"/>
-              <a:t>점수를 매기게 하면 애착으로 고르는 걸 막을 수 있다. 실습에서 실제로 매기게 할 것.</a:t>
+              <a:t>[운영 메모]
+점수를 매기게 하면 애착으로 고르는 걸 막을 수 있다. 실습에서 실제로 매기게 할 것.</a:t>
             </a:r>
             <a:endParaRPr lang="en-US" dirty="0"/>
           </a:p>
@@ -1217,7 +1225,8 @@
           <a:p>
             <a:r>
               <a:rPr lang="en-US" dirty="0"/>
-              <a:t>분량 계산을 실제로 보여주면 설득이 빠르다 — 프로젝트 6개면 하나당 3~4장, 그러면 과정을 못 넣는다.</a:t>
+              <a:t>[운영 메모]
+분량 계산을 실제로 보여주면 설득이 빠르다 — 프로젝트 6개면 하나당 3~4장, 그러면 과정을 못 넣는다.</a:t>
             </a:r>
             <a:endParaRPr lang="en-US" dirty="0"/>
           </a:p>
@@ -1305,7 +1314,8 @@
           <a:p>
             <a:r>
               <a:rPr lang="en-US" dirty="0"/>
-              <a:t>여기서 스토리보드 양식을 화면에 띄우고 설명.</a:t>
+              <a:t>[운영 메모]
+여기서 스토리보드 양식을 화면에 띄우고 설명.</a:t>
             </a:r>
             <a:endParaRPr lang="en-US" dirty="0"/>
           </a:p>
@@ -1393,7 +1403,8 @@
           <a:p>
             <a:r>
               <a:rPr lang="en-US" dirty="0"/>
-              <a:t>학생 대부분이 결과에 장수를 몰아준다. 배분 숫자를 제시하면 바로 고쳐진다.</a:t>
+              <a:t>[운영 메모]
+학생 대부분이 결과에 장수를 몰아준다. 배분 숫자를 제시하면 바로 고쳐진다.</a:t>
             </a:r>
             <a:endParaRPr lang="en-US" dirty="0"/>
           </a:p>
@@ -1481,7 +1492,8 @@
           <a:p>
             <a:r>
               <a:rPr lang="en-US" dirty="0"/>
-              <a:t>시간순이 무조건 나쁜 건 아니다. 성장 서사를 의도한 경우는 예외라고 덧붙일 것.</a:t>
+              <a:t>[운영 메모]
+시간순이 무조건 나쁜 건 아니다. 성장 서사를 의도한 경우는 예외라고 덧붙일 것.</a:t>
             </a:r>
             <a:endParaRPr lang="en-US" dirty="0"/>
           </a:p>
